--- a/Unit1-Review.pptx
+++ b/Unit1-Review.pptx
@@ -20754,7 +20754,7 @@
                 <a:ea typeface="Calibri" pitchFamily="34" charset="-122"/>
                 <a:cs typeface="Calibri" pitchFamily="34" charset="-120"/>
               </a:rPr>
-              <a:t>Muslim merchants dominated</a:t>
+              <a:t>Muslim merchants were prominent across</a:t>
             </a:r>
             <a:endParaRPr lang="en-US" sz="850" dirty="0"/>
           </a:p>
